--- a/보장설명서_이종수님_편집가능.pptx
+++ b/보장설명서_이종수님_편집가능.pptx
@@ -5313,7 +5313,7 @@
                 <a:ea typeface="맑은 고딕"/>
                 <a:cs typeface="맑은 고딕"/>
               </a:rPr>
-              <a:t>중입자치료비 3,000만</a:t>
+              <a:t>중입자치료비 1억</a:t>
             </a:r>
           </a:p>
         </p:txBody>
@@ -5793,21 +5793,7 @@
                 <a:ea typeface="맑은 고딕"/>
                 <a:cs typeface="맑은 고딕"/>
               </a:rPr>
-              <a:t>상해수술비 100만   중대한상해수술비 2,000만   심장수술비 2,000만</a:t>
-            </a:r>
-          </a:p>
-          <a:p>
-            <a:pPr algn="l"/>
-            <a:r>
-              <a:rPr sz="900" b="0">
-                <a:solidFill>
-                  <a:srgbClr val="1A1A1A"/>
-                </a:solidFill>
-                <a:latin typeface="맑은 고딕"/>
-                <a:ea typeface="맑은 고딕"/>
-                <a:cs typeface="맑은 고딕"/>
-              </a:rPr>
-              <a:t>상해 종수술비 110/0/0/500/500</a:t>
+              <a:t>상해수술비 100만   중대한상해수술비 2,000만   상해 종수술비 110/0/0/500/500</a:t>
             </a:r>
           </a:p>
         </p:txBody>
@@ -6141,7 +6127,7 @@
                 <a:ea typeface="맑은 고딕"/>
                 <a:cs typeface="맑은 고딕"/>
               </a:rPr>
-              <a:t>상해중환자실 10만   간호통합병동 20만   상해수술일당 3만</a:t>
+              <a:t>상해중환자실 10만   간호통합병동 7만   상해수술일당 3만</a:t>
             </a:r>
           </a:p>
           <a:p>
@@ -6489,7 +6475,7 @@
                 <a:ea typeface="맑은 고딕"/>
                 <a:cs typeface="맑은 고딕"/>
               </a:rPr>
-              <a:t>중증화상진단비 1,000만   골절 160만   5대골절진단비 40만</a:t>
+              <a:t>중증화상진단비 1,000만   골절 70만   5대골절진단비 40만</a:t>
             </a:r>
           </a:p>
           <a:p>
@@ -9643,7 +9629,7 @@
       </p:sp>
       <p:pic>
         <p:nvPicPr>
-          <p:cNvPr id="8" name="Picture 7" descr="g100_1327.png"/>
+          <p:cNvPr id="8" name="Picture 7" descr="g100_8409.png"/>
           <p:cNvPicPr>
             <a:picLocks noChangeAspect="1"/>
           </p:cNvPicPr>
@@ -9741,7 +9727,7 @@
       </p:sp>
       <p:pic>
         <p:nvPicPr>
-          <p:cNvPr id="11" name="Picture 10" descr="g100_1327.png"/>
+          <p:cNvPr id="11" name="Picture 10" descr="g100_8409.png"/>
           <p:cNvPicPr>
             <a:picLocks noChangeAspect="1"/>
           </p:cNvPicPr>
@@ -9839,7 +9825,7 @@
       </p:sp>
       <p:pic>
         <p:nvPicPr>
-          <p:cNvPr id="14" name="Picture 13" descr="g100_1327.png"/>
+          <p:cNvPr id="14" name="Picture 13" descr="g100_8409.png"/>
           <p:cNvPicPr>
             <a:picLocks noChangeAspect="1"/>
           </p:cNvPicPr>
@@ -9937,7 +9923,7 @@
       </p:sp>
       <p:pic>
         <p:nvPicPr>
-          <p:cNvPr id="17" name="Picture 16" descr="g100_1327.png"/>
+          <p:cNvPr id="17" name="Picture 16" descr="g100_8409.png"/>
           <p:cNvPicPr>
             <a:picLocks noChangeAspect="1"/>
           </p:cNvPicPr>
@@ -10035,7 +10021,7 @@
       </p:sp>
       <p:pic>
         <p:nvPicPr>
-          <p:cNvPr id="20" name="Picture 19" descr="g22_1005.png"/>
+          <p:cNvPr id="20" name="Picture 19" descr="g22_6913.png"/>
           <p:cNvPicPr>
             <a:picLocks noChangeAspect="1"/>
           </p:cNvPicPr>
@@ -10133,7 +10119,7 @@
       </p:sp>
       <p:pic>
         <p:nvPicPr>
-          <p:cNvPr id="23" name="Picture 22" descr="g100_1327.png"/>
+          <p:cNvPr id="23" name="Picture 22" descr="g100_8409.png"/>
           <p:cNvPicPr>
             <a:picLocks noChangeAspect="1"/>
           </p:cNvPicPr>
@@ -10231,7 +10217,7 @@
       </p:sp>
       <p:pic>
         <p:nvPicPr>
-          <p:cNvPr id="26" name="Picture 25" descr="g100_1327.png"/>
+          <p:cNvPr id="26" name="Picture 25" descr="g100_8409.png"/>
           <p:cNvPicPr>
             <a:picLocks noChangeAspect="1"/>
           </p:cNvPicPr>
@@ -10329,7 +10315,7 @@
       </p:sp>
       <p:pic>
         <p:nvPicPr>
-          <p:cNvPr id="29" name="Picture 28" descr="g33_6019.png"/>
+          <p:cNvPr id="29" name="Picture 28" descr="g33_8591.png"/>
           <p:cNvPicPr>
             <a:picLocks noChangeAspect="1"/>
           </p:cNvPicPr>
@@ -10427,7 +10413,7 @@
       </p:sp>
       <p:pic>
         <p:nvPicPr>
-          <p:cNvPr id="32" name="Picture 31" descr="g100_1327.png"/>
+          <p:cNvPr id="32" name="Picture 31" descr="g100_8409.png"/>
           <p:cNvPicPr>
             <a:picLocks noChangeAspect="1"/>
           </p:cNvPicPr>
@@ -10525,7 +10511,7 @@
       </p:sp>
       <p:pic>
         <p:nvPicPr>
-          <p:cNvPr id="35" name="Picture 34" descr="g50_1338.png"/>
+          <p:cNvPr id="35" name="Picture 34" descr="g50_3782.png"/>
           <p:cNvPicPr>
             <a:picLocks noChangeAspect="1"/>
           </p:cNvPicPr>
@@ -11131,7 +11117,7 @@
                 <a:ea typeface="맑은 고딕"/>
                 <a:cs typeface="맑은 고딕"/>
               </a:rPr>
-              <a:t>20,400만</a:t>
+              <a:t>30,300만</a:t>
             </a:r>
           </a:p>
         </p:txBody>
@@ -12103,7 +12089,7 @@
                 <a:ea typeface="맑은 고딕"/>
                 <a:cs typeface="맑은 고딕"/>
               </a:rPr>
-              <a:t>7개</a:t>
+              <a:t>6개</a:t>
             </a:r>
           </a:p>
         </p:txBody>
@@ -13391,7 +13377,7 @@
                 <a:ea typeface="맑은 고딕"/>
                 <a:cs typeface="맑은 고딕"/>
               </a:rPr>
-              <a:t>7개</a:t>
+              <a:t>6개</a:t>
             </a:r>
           </a:p>
         </p:txBody>
@@ -14039,7 +14025,7 @@
                 <a:ea typeface="맑은 고딕"/>
                 <a:cs typeface="맑은 고딕"/>
               </a:rPr>
-              <a:t>5개</a:t>
+              <a:t>6개</a:t>
             </a:r>
           </a:p>
         </p:txBody>

--- a/보장설명서_이종수님_편집가능.pptx
+++ b/보장설명서_이종수님_편집가능.pptx
@@ -5313,7 +5313,7 @@
                 <a:ea typeface="맑은 고딕"/>
                 <a:cs typeface="맑은 고딕"/>
               </a:rPr>
-              <a:t>중입자치료비 1억</a:t>
+              <a:t>중입자치료비 5,000만</a:t>
             </a:r>
           </a:p>
         </p:txBody>
@@ -5967,7 +5967,7 @@
                 <a:ea typeface="맑은 고딕"/>
                 <a:cs typeface="맑은 고딕"/>
               </a:rPr>
-              <a:t>대물 500만</a:t>
+              <a:t>대물 500만   6주미만 1,000만   자부상 30만</a:t>
             </a:r>
           </a:p>
         </p:txBody>
@@ -6127,7 +6127,7 @@
                 <a:ea typeface="맑은 고딕"/>
                 <a:cs typeface="맑은 고딕"/>
               </a:rPr>
-              <a:t>상해중환자실 10만   간호통합병동 7만   상해수술일당 3만</a:t>
+              <a:t>간병인 20만   간호통합병동 7만   상해중환자실 10만</a:t>
             </a:r>
           </a:p>
           <a:p>
@@ -6141,7 +6141,7 @@
                 <a:ea typeface="맑은 고딕"/>
                 <a:cs typeface="맑은 고딕"/>
               </a:rPr>
-              <a:t>질병일당 1만</a:t>
+              <a:t>상해수술일당 3만   질병일당 1만   상해일당 2만</a:t>
             </a:r>
           </a:p>
         </p:txBody>
@@ -9629,7 +9629,7 @@
       </p:sp>
       <p:pic>
         <p:nvPicPr>
-          <p:cNvPr id="8" name="Picture 7" descr="g100_8409.png"/>
+          <p:cNvPr id="8" name="Picture 7" descr="g100_2496.png"/>
           <p:cNvPicPr>
             <a:picLocks noChangeAspect="1"/>
           </p:cNvPicPr>
@@ -9727,7 +9727,7 @@
       </p:sp>
       <p:pic>
         <p:nvPicPr>
-          <p:cNvPr id="11" name="Picture 10" descr="g100_8409.png"/>
+          <p:cNvPr id="11" name="Picture 10" descr="g100_2496.png"/>
           <p:cNvPicPr>
             <a:picLocks noChangeAspect="1"/>
           </p:cNvPicPr>
@@ -9825,7 +9825,7 @@
       </p:sp>
       <p:pic>
         <p:nvPicPr>
-          <p:cNvPr id="14" name="Picture 13" descr="g100_8409.png"/>
+          <p:cNvPr id="14" name="Picture 13" descr="g100_2496.png"/>
           <p:cNvPicPr>
             <a:picLocks noChangeAspect="1"/>
           </p:cNvPicPr>
@@ -9923,7 +9923,7 @@
       </p:sp>
       <p:pic>
         <p:nvPicPr>
-          <p:cNvPr id="17" name="Picture 16" descr="g100_8409.png"/>
+          <p:cNvPr id="17" name="Picture 16" descr="g100_2496.png"/>
           <p:cNvPicPr>
             <a:picLocks noChangeAspect="1"/>
           </p:cNvPicPr>
@@ -10021,7 +10021,7 @@
       </p:sp>
       <p:pic>
         <p:nvPicPr>
-          <p:cNvPr id="20" name="Picture 19" descr="g22_6913.png"/>
+          <p:cNvPr id="20" name="Picture 19" descr="g22_1461.png"/>
           <p:cNvPicPr>
             <a:picLocks noChangeAspect="1"/>
           </p:cNvPicPr>
@@ -10119,7 +10119,7 @@
       </p:sp>
       <p:pic>
         <p:nvPicPr>
-          <p:cNvPr id="23" name="Picture 22" descr="g100_8409.png"/>
+          <p:cNvPr id="23" name="Picture 22" descr="g100_2496.png"/>
           <p:cNvPicPr>
             <a:picLocks noChangeAspect="1"/>
           </p:cNvPicPr>
@@ -10217,7 +10217,7 @@
       </p:sp>
       <p:pic>
         <p:nvPicPr>
-          <p:cNvPr id="26" name="Picture 25" descr="g100_8409.png"/>
+          <p:cNvPr id="26" name="Picture 25" descr="g100_2496.png"/>
           <p:cNvPicPr>
             <a:picLocks noChangeAspect="1"/>
           </p:cNvPicPr>
@@ -10315,7 +10315,7 @@
       </p:sp>
       <p:pic>
         <p:nvPicPr>
-          <p:cNvPr id="29" name="Picture 28" descr="g33_8591.png"/>
+          <p:cNvPr id="29" name="Picture 28" descr="g33_9285.png"/>
           <p:cNvPicPr>
             <a:picLocks noChangeAspect="1"/>
           </p:cNvPicPr>
@@ -10413,7 +10413,7 @@
       </p:sp>
       <p:pic>
         <p:nvPicPr>
-          <p:cNvPr id="32" name="Picture 31" descr="g100_8409.png"/>
+          <p:cNvPr id="32" name="Picture 31" descr="g100_2496.png"/>
           <p:cNvPicPr>
             <a:picLocks noChangeAspect="1"/>
           </p:cNvPicPr>
@@ -10511,7 +10511,7 @@
       </p:sp>
       <p:pic>
         <p:nvPicPr>
-          <p:cNvPr id="35" name="Picture 34" descr="g50_3782.png"/>
+          <p:cNvPr id="35" name="Picture 34" descr="g50_4680.png"/>
           <p:cNvPicPr>
             <a:picLocks noChangeAspect="1"/>
           </p:cNvPicPr>
@@ -11117,7 +11117,7 @@
                 <a:ea typeface="맑은 고딕"/>
                 <a:cs typeface="맑은 고딕"/>
               </a:rPr>
-              <a:t>30,300만</a:t>
+              <a:t>25,300만</a:t>
             </a:r>
           </a:p>
         </p:txBody>
@@ -23055,7 +23055,7 @@
         <p:spPr>
           <a:xfrm>
             <a:off x="594360" y="1737360"/>
-            <a:ext cx="3657600" cy="292608"/>
+            <a:ext cx="3200400" cy="292608"/>
           </a:xfrm>
           <a:prstGeom prst="rect">
             <a:avLst/>
@@ -23092,7 +23092,7 @@
         <p:spPr>
           <a:xfrm>
             <a:off x="594360" y="2048256"/>
-            <a:ext cx="3657600" cy="548640"/>
+            <a:ext cx="3200400" cy="548640"/>
           </a:xfrm>
           <a:prstGeom prst="rect">
             <a:avLst/>
@@ -23128,8 +23128,8 @@
         </p:nvSpPr>
         <p:spPr>
           <a:xfrm>
-            <a:off x="4023360" y="1664208"/>
-            <a:ext cx="1737360" cy="1051560"/>
+            <a:off x="3703320" y="1664208"/>
+            <a:ext cx="2057400" cy="1051560"/>
           </a:xfrm>
           <a:prstGeom prst="rect">
             <a:avLst/>
@@ -23210,7 +23210,7 @@
         <p:spPr>
           <a:xfrm>
             <a:off x="594360" y="2926080"/>
-            <a:ext cx="3657600" cy="292608"/>
+            <a:ext cx="3200400" cy="292608"/>
           </a:xfrm>
           <a:prstGeom prst="rect">
             <a:avLst/>
@@ -23247,7 +23247,7 @@
         <p:spPr>
           <a:xfrm>
             <a:off x="594360" y="3236976"/>
-            <a:ext cx="3657600" cy="548640"/>
+            <a:ext cx="3200400" cy="548640"/>
           </a:xfrm>
           <a:prstGeom prst="rect">
             <a:avLst/>
@@ -23283,8 +23283,8 @@
         </p:nvSpPr>
         <p:spPr>
           <a:xfrm>
-            <a:off x="4023360" y="2852928"/>
-            <a:ext cx="1737360" cy="1051560"/>
+            <a:off x="3703320" y="2852928"/>
+            <a:ext cx="2057400" cy="1051560"/>
           </a:xfrm>
           <a:prstGeom prst="rect">
             <a:avLst/>
@@ -23365,7 +23365,7 @@
         <p:spPr>
           <a:xfrm>
             <a:off x="594360" y="4114800"/>
-            <a:ext cx="3657600" cy="292608"/>
+            <a:ext cx="3200400" cy="292608"/>
           </a:xfrm>
           <a:prstGeom prst="rect">
             <a:avLst/>
@@ -23402,7 +23402,7 @@
         <p:spPr>
           <a:xfrm>
             <a:off x="594360" y="4425696"/>
-            <a:ext cx="3657600" cy="548640"/>
+            <a:ext cx="3200400" cy="548640"/>
           </a:xfrm>
           <a:prstGeom prst="rect">
             <a:avLst/>
@@ -23438,8 +23438,8 @@
         </p:nvSpPr>
         <p:spPr>
           <a:xfrm>
-            <a:off x="4023360" y="4041648"/>
-            <a:ext cx="1737360" cy="1051560"/>
+            <a:off x="3703320" y="4041648"/>
+            <a:ext cx="2057400" cy="1051560"/>
           </a:xfrm>
           <a:prstGeom prst="rect">
             <a:avLst/>
@@ -23520,7 +23520,7 @@
         <p:spPr>
           <a:xfrm>
             <a:off x="6537960" y="1737360"/>
-            <a:ext cx="3657600" cy="292608"/>
+            <a:ext cx="3200400" cy="292608"/>
           </a:xfrm>
           <a:prstGeom prst="rect">
             <a:avLst/>
@@ -23557,7 +23557,7 @@
         <p:spPr>
           <a:xfrm>
             <a:off x="6537960" y="2048256"/>
-            <a:ext cx="3657600" cy="548640"/>
+            <a:ext cx="3200400" cy="548640"/>
           </a:xfrm>
           <a:prstGeom prst="rect">
             <a:avLst/>
@@ -23593,8 +23593,8 @@
         </p:nvSpPr>
         <p:spPr>
           <a:xfrm>
-            <a:off x="9966960" y="1664208"/>
-            <a:ext cx="1737360" cy="1051560"/>
+            <a:off x="9646920" y="1664208"/>
+            <a:ext cx="2057400" cy="1051560"/>
           </a:xfrm>
           <a:prstGeom prst="rect">
             <a:avLst/>
@@ -23609,7 +23609,7 @@
           <a:p>
             <a:pPr algn="r"/>
             <a:r>
-              <a:rPr sz="1150" b="1">
+              <a:rPr sz="950" b="1">
                 <a:solidFill>
                   <a:srgbClr val="1B2A4A"/>
                 </a:solidFill>
@@ -23675,7 +23675,7 @@
         <p:spPr>
           <a:xfrm>
             <a:off x="6537960" y="2926080"/>
-            <a:ext cx="3657600" cy="292608"/>
+            <a:ext cx="3200400" cy="292608"/>
           </a:xfrm>
           <a:prstGeom prst="rect">
             <a:avLst/>
@@ -23712,7 +23712,7 @@
         <p:spPr>
           <a:xfrm>
             <a:off x="6537960" y="3236976"/>
-            <a:ext cx="3657600" cy="548640"/>
+            <a:ext cx="3200400" cy="548640"/>
           </a:xfrm>
           <a:prstGeom prst="rect">
             <a:avLst/>
@@ -23748,8 +23748,8 @@
         </p:nvSpPr>
         <p:spPr>
           <a:xfrm>
-            <a:off x="9966960" y="2852928"/>
-            <a:ext cx="1737360" cy="1051560"/>
+            <a:off x="9646920" y="2852928"/>
+            <a:ext cx="2057400" cy="1051560"/>
           </a:xfrm>
           <a:prstGeom prst="rect">
             <a:avLst/>
@@ -23830,7 +23830,7 @@
         <p:spPr>
           <a:xfrm>
             <a:off x="6537960" y="4114800"/>
-            <a:ext cx="3657600" cy="292608"/>
+            <a:ext cx="3200400" cy="292608"/>
           </a:xfrm>
           <a:prstGeom prst="rect">
             <a:avLst/>
@@ -23867,7 +23867,7 @@
         <p:spPr>
           <a:xfrm>
             <a:off x="6537960" y="4425696"/>
-            <a:ext cx="3657600" cy="548640"/>
+            <a:ext cx="3200400" cy="548640"/>
           </a:xfrm>
           <a:prstGeom prst="rect">
             <a:avLst/>
@@ -23903,8 +23903,8 @@
         </p:nvSpPr>
         <p:spPr>
           <a:xfrm>
-            <a:off x="9966960" y="4041648"/>
-            <a:ext cx="1737360" cy="1051560"/>
+            <a:off x="9646920" y="4041648"/>
+            <a:ext cx="2057400" cy="1051560"/>
           </a:xfrm>
           <a:prstGeom prst="rect">
             <a:avLst/>
